--- a/PRG4/Medina/2. ORM/EF_Core.pptx
+++ b/PRG4/Medina/2. ORM/EF_Core.pptx
@@ -7165,45 +7165,6 @@
       </p:sp>
       <p:sp>
         <p:nvSpPr>
-          <p:cNvPr id="3" name="Text 1"/>
-          <p:cNvSpPr/>
-          <p:nvPr/>
-        </p:nvSpPr>
-        <p:spPr>
-          <a:xfrm>
-            <a:off x="548640" y="1024128"/>
-            <a:ext cx="11091672" cy="365760"/>
-          </a:xfrm>
-          <a:prstGeom prst="rect">
-            <a:avLst/>
-          </a:prstGeom>
-          <a:noFill/>
-          <a:ln/>
-        </p:spPr>
-        <p:txBody>
-          <a:bodyPr wrap="square" lIns="0" tIns="0" rIns="0" bIns="0" rtlCol="0" anchor="ctr"/>
-          <a:lstStyle/>
-          <a:p>
-            <a:pPr marL="0" indent="0" algn="l">
-              <a:buNone/>
-            </a:pPr>
-            <a:r>
-              <a:rPr lang="en-US" sz="1400" i="1" dirty="0">
-                <a:solidFill>
-                  <a:srgbClr val="1C7293"/>
-                </a:solidFill>
-                <a:latin typeface="Calibri" pitchFamily="34" charset="0"/>
-                <a:ea typeface="Calibri" pitchFamily="34" charset="-122"/>
-                <a:cs typeface="Calibri" pitchFamily="34" charset="-120"/>
-              </a:rPr>
-              <a:t>Profiles, registro en DI y proyección eficiente con EF Core</a:t>
-            </a:r>
-            <a:endParaRPr lang="en-US" sz="1400" dirty="0"/>
-          </a:p>
-        </p:txBody>
-      </p:sp>
-      <p:sp>
-        <p:nvSpPr>
           <p:cNvPr id="4" name="Shape 2"/>
           <p:cNvSpPr/>
           <p:nvPr/>
@@ -9663,6 +9624,191 @@
           </a:p>
         </p:txBody>
       </p:sp>
+      <p:sp>
+        <p:nvSpPr>
+          <p:cNvPr id="34" name="CuadroTexto 33">
+            <a:extLst>
+              <a:ext uri="{FF2B5EF4-FFF2-40B4-BE49-F238E27FC236}">
+                <a16:creationId xmlns:a16="http://schemas.microsoft.com/office/drawing/2014/main" id="{8F107580-A65A-293E-F569-7AA32AADDE15}"/>
+              </a:ext>
+            </a:extLst>
+          </p:cNvPr>
+          <p:cNvSpPr txBox="1"/>
+          <p:nvPr/>
+        </p:nvSpPr>
+        <p:spPr>
+          <a:xfrm>
+            <a:off x="8229600" y="4869327"/>
+            <a:ext cx="3528699" cy="1269578"/>
+          </a:xfrm>
+          <a:prstGeom prst="rect">
+            <a:avLst/>
+          </a:prstGeom>
+          <a:noFill/>
+        </p:spPr>
+        <p:txBody>
+          <a:bodyPr wrap="square">
+            <a:spAutoFit/>
+          </a:bodyPr>
+          <a:lstStyle/>
+          <a:p>
+            <a:pPr marL="342900" marR="0" lvl="0" indent="-342900">
+              <a:spcAft>
+                <a:spcPts val="900"/>
+              </a:spcAft>
+              <a:buFont typeface="Arial" panose="020B0604020202020204" pitchFamily="34" charset="0"/>
+              <a:buChar char="•"/>
+            </a:pPr>
+            <a:r>
+              <a:rPr lang="es-AR" sz="1050" b="0" u="none" strike="noStrike" dirty="0" err="1">
+                <a:effectLst/>
+                <a:latin typeface="Courier New" panose="02070309020205020404" pitchFamily="49" charset="0"/>
+              </a:rPr>
+              <a:t>using</a:t>
+            </a:r>
+            <a:r>
+              <a:rPr lang="es-AR" sz="1050" b="0" u="none" strike="noStrike" dirty="0">
+                <a:effectLst/>
+                <a:latin typeface="Courier New" panose="02070309020205020404" pitchFamily="49" charset="0"/>
+              </a:rPr>
+              <a:t> </a:t>
+            </a:r>
+            <a:r>
+              <a:rPr lang="es-AR" sz="1050" b="0" u="none" strike="noStrike" dirty="0" err="1">
+                <a:effectLst/>
+                <a:latin typeface="Courier New" panose="02070309020205020404" pitchFamily="49" charset="0"/>
+              </a:rPr>
+              <a:t>var</a:t>
+            </a:r>
+            <a:r>
+              <a:rPr lang="es-AR" sz="1050" b="0" u="none" strike="noStrike" dirty="0">
+                <a:effectLst/>
+                <a:latin typeface="Courier New" panose="02070309020205020404" pitchFamily="49" charset="0"/>
+              </a:rPr>
+              <a:t> </a:t>
+            </a:r>
+            <a:r>
+              <a:rPr lang="es-AR" sz="1050" b="0" u="none" strike="noStrike" dirty="0" err="1">
+                <a:effectLst/>
+                <a:latin typeface="Courier New" panose="02070309020205020404" pitchFamily="49" charset="0"/>
+              </a:rPr>
+              <a:t>transaction</a:t>
+            </a:r>
+            <a:r>
+              <a:rPr lang="es-AR" sz="1050" b="0" u="none" strike="noStrike" dirty="0">
+                <a:effectLst/>
+                <a:latin typeface="Courier New" panose="02070309020205020404" pitchFamily="49" charset="0"/>
+              </a:rPr>
+              <a:t> = </a:t>
+            </a:r>
+            <a:r>
+              <a:rPr lang="es-AR" sz="1050" b="0" u="none" strike="noStrike" dirty="0" err="1">
+                <a:effectLst/>
+                <a:latin typeface="Courier New" panose="02070309020205020404" pitchFamily="49" charset="0"/>
+              </a:rPr>
+              <a:t>context.Database.BeginTransaction</a:t>
+            </a:r>
+            <a:r>
+              <a:rPr lang="es-AR" sz="1050" b="0" u="none" strike="noStrike" dirty="0">
+                <a:effectLst/>
+                <a:latin typeface="Courier New" panose="02070309020205020404" pitchFamily="49" charset="0"/>
+              </a:rPr>
+              <a:t>();</a:t>
+            </a:r>
+            <a:endParaRPr lang="es-AR" sz="1200" b="0" u="none" strike="noStrike" dirty="0">
+              <a:effectLst/>
+              <a:latin typeface="Google Sans"/>
+            </a:endParaRPr>
+          </a:p>
+          <a:p>
+            <a:pPr marL="342900" marR="0" lvl="0" indent="-342900">
+              <a:spcAft>
+                <a:spcPts val="900"/>
+              </a:spcAft>
+              <a:buFont typeface="Arial" panose="020B0604020202020204" pitchFamily="34" charset="0"/>
+              <a:buChar char="•"/>
+            </a:pPr>
+            <a:r>
+              <a:rPr lang="es-AR" sz="1050" b="0" u="none" strike="noStrike" dirty="0" err="1">
+                <a:effectLst/>
+                <a:latin typeface="Courier New" panose="02070309020205020404" pitchFamily="49" charset="0"/>
+              </a:rPr>
+              <a:t>context.SaveChanges</a:t>
+            </a:r>
+            <a:r>
+              <a:rPr lang="es-AR" sz="1050" b="0" u="none" strike="noStrike" dirty="0">
+                <a:effectLst/>
+                <a:latin typeface="Courier New" panose="02070309020205020404" pitchFamily="49" charset="0"/>
+              </a:rPr>
+              <a:t>()</a:t>
+            </a:r>
+            <a:r>
+              <a:rPr lang="es-AR" sz="1200" dirty="0">
+                <a:latin typeface="Google Sans"/>
+              </a:rPr>
+              <a:t>;</a:t>
+            </a:r>
+            <a:endParaRPr lang="es-AR" sz="1200" b="0" u="none" strike="noStrike" dirty="0">
+              <a:effectLst/>
+              <a:latin typeface="Google Sans"/>
+            </a:endParaRPr>
+          </a:p>
+          <a:p>
+            <a:pPr marL="342900" marR="0" lvl="0" indent="-342900">
+              <a:spcAft>
+                <a:spcPts val="900"/>
+              </a:spcAft>
+              <a:buFont typeface="Arial" panose="020B0604020202020204" pitchFamily="34" charset="0"/>
+              <a:buChar char="•"/>
+            </a:pPr>
+            <a:r>
+              <a:rPr lang="es-AR" sz="1050" b="0" u="none" strike="noStrike" dirty="0" err="1">
+                <a:effectLst/>
+                <a:latin typeface="Courier New" panose="02070309020205020404" pitchFamily="49" charset="0"/>
+              </a:rPr>
+              <a:t>transaction.Commit</a:t>
+            </a:r>
+            <a:r>
+              <a:rPr lang="es-AR" sz="1050" b="0" u="none" strike="noStrike" dirty="0">
+                <a:effectLst/>
+                <a:latin typeface="Courier New" panose="02070309020205020404" pitchFamily="49" charset="0"/>
+              </a:rPr>
+              <a:t>();</a:t>
+            </a:r>
+            <a:endParaRPr lang="es-AR" sz="1200" b="0" u="none" strike="noStrike" dirty="0">
+              <a:effectLst/>
+              <a:latin typeface="Google Sans"/>
+            </a:endParaRPr>
+          </a:p>
+          <a:p>
+            <a:pPr marL="342900" marR="0" lvl="0" indent="-342900">
+              <a:spcAft>
+                <a:spcPts val="900"/>
+              </a:spcAft>
+              <a:buFont typeface="Arial" panose="020B0604020202020204" pitchFamily="34" charset="0"/>
+              <a:buChar char="•"/>
+            </a:pPr>
+            <a:r>
+              <a:rPr lang="es-AR" sz="1050" b="0" u="none" strike="noStrike" dirty="0" err="1">
+                <a:effectLst/>
+                <a:latin typeface="Courier New" panose="02070309020205020404" pitchFamily="49" charset="0"/>
+              </a:rPr>
+              <a:t>transaction.Rollback</a:t>
+            </a:r>
+            <a:r>
+              <a:rPr lang="es-AR" sz="1050" b="0" u="none" strike="noStrike" dirty="0">
+                <a:effectLst/>
+                <a:latin typeface="Courier New" panose="02070309020205020404" pitchFamily="49" charset="0"/>
+              </a:rPr>
+              <a:t>();</a:t>
+            </a:r>
+            <a:endParaRPr lang="es-AR" sz="1200" b="0" u="none" strike="noStrike" dirty="0">
+              <a:effectLst/>
+              <a:latin typeface="Google Sans"/>
+            </a:endParaRPr>
+          </a:p>
+        </p:txBody>
+      </p:sp>
     </p:spTree>
   </p:cSld>
   <p:clrMapOvr>
@@ -10804,7 +10950,29 @@
                 <a:ea typeface="Calibri" pitchFamily="34" charset="-122"/>
                 <a:cs typeface="Calibri" pitchFamily="34" charset="-120"/>
               </a:rPr>
-              <a:t>Vimos que el modelo puede partir del código o de una base existente. Hoy vamos a llevar ambos flujos a la práctica con EF Core.</a:t>
+              <a:t>Vimos que el modelo puede partir del código o de una base </a:t>
+            </a:r>
+            <a:r>
+              <a:rPr lang="en-US" sz="1150" dirty="0" err="1">
+                <a:solidFill>
+                  <a:srgbClr val="EAF3F8"/>
+                </a:solidFill>
+                <a:latin typeface="Calibri" pitchFamily="34" charset="0"/>
+                <a:ea typeface="Calibri" pitchFamily="34" charset="-122"/>
+                <a:cs typeface="Calibri" pitchFamily="34" charset="-120"/>
+              </a:rPr>
+              <a:t>existente</a:t>
+            </a:r>
+            <a:r>
+              <a:rPr lang="en-US" sz="1150" dirty="0">
+                <a:solidFill>
+                  <a:srgbClr val="EAF3F8"/>
+                </a:solidFill>
+                <a:latin typeface="Calibri" pitchFamily="34" charset="0"/>
+                <a:ea typeface="Calibri" pitchFamily="34" charset="-122"/>
+                <a:cs typeface="Calibri" pitchFamily="34" charset="-120"/>
+              </a:rPr>
+              <a:t>.</a:t>
             </a:r>
             <a:endParaRPr lang="en-US" sz="1150" dirty="0"/>
           </a:p>
